--- a/brand/spark-packaging-deck-template.pptx
+++ b/brand/spark-packaging-deck-template.pptx
@@ -111,27 +111,27 @@
   <p:extLst>
     <p:ext uri="{521415D9-36F7-43E2-AB2F-B90AF26B5E84}">
       <p14:sectionLst xmlns:p14="http://schemas.microsoft.com/office/powerpoint/2010/main">
-        <p14:section name="Cover" id="{bdd656be-feca-7e05-4bb2-4368c0be2aff}">
+        <p14:section name="Cover" id="{356d2334-8a17-0e6c-ee97-506eccf8be23}">
           <p14:sldIdLst>
             <p14:sldId id="256"/>
           </p14:sldIdLst>
         </p14:section>
-        <p14:section name="Divider" id="{2c7cd1c4-304e-c8b4-f4d8-49f330d272b7}">
+        <p14:section name="Divider" id="{421e9f0b-a0f1-0086-4861-f5da8f71a104}">
           <p14:sldIdLst>
             <p14:sldId id="257"/>
           </p14:sldIdLst>
         </p14:section>
-        <p14:section name="Content" id="{deb6deca-a984-5a1b-3e3d-ea0548f041df}">
+        <p14:section name="Content" id="{4761cd03-a9ec-3833-50d7-c6174ebd86e9}">
           <p14:sldIdLst>
             <p14:sldId id="258"/>
           </p14:sldIdLst>
         </p14:section>
-        <p14:section name="Numbers" id="{48f1a7c2-7998-b8e4-065a-e1450b9477a4}">
+        <p14:section name="Numbers" id="{30cbd045-256c-52ae-4ca1-18b084df01bb}">
           <p14:sldIdLst>
             <p14:sldId id="259"/>
           </p14:sldIdLst>
         </p14:section>
-        <p14:section name="Close" id="{e6dbc6e9-92ab-6bf1-2711-b5e447166682}">
+        <p14:section name="Close" id="{1e9589be-8e48-9b29-ea84-78c88767f281}">
           <p14:sldIdLst>
             <p14:sldId id="260"/>
           </p14:sldIdLst>
@@ -970,7 +970,7 @@
     <p:bg>
       <p:bgPr>
         <a:solidFill>
-          <a:srgbClr val="3D3D3D"/>
+          <a:srgbClr val="3E3E3E"/>
         </a:solidFill>
       </p:bgPr>
     </p:bg>
@@ -1005,7 +1005,7 @@
         <p:spPr>
           <a:xfrm>
             <a:off x="658368" y="548640"/>
-            <a:ext cx="2299716" cy="726948"/>
+            <a:ext cx="2204618" cy="726948"/>
           </a:xfrm>
           <a:prstGeom prst="rect">
             <a:avLst/>
@@ -1144,7 +1144,7 @@
             <a:avLst/>
           </a:prstGeom>
           <a:solidFill>
-            <a:srgbClr val="FFDD5F"/>
+            <a:srgbClr val="FFDE59"/>
           </a:solidFill>
           <a:ln/>
         </p:spPr>
@@ -1163,7 +1163,7 @@
     <p:bg>
       <p:bgPr>
         <a:solidFill>
-          <a:srgbClr val="3D3D3D"/>
+          <a:srgbClr val="3E3E3E"/>
         </a:solidFill>
       </p:bgPr>
     </p:bg>
@@ -1207,7 +1207,7 @@
               <a:buNone/>
               <a:defRPr lang="en-US" sz="1300" b="1" spc="400" kern="0" dirty="0">
                 <a:solidFill>
-                  <a:srgbClr val="FFDD5F"/>
+                  <a:srgbClr val="FFDE59"/>
                 </a:solidFill>
               </a:defRPr>
             </a:lvl1pPr>
@@ -1276,7 +1276,7 @@
         <p:spPr>
           <a:xfrm>
             <a:off x="10332720" y="5852160"/>
-            <a:ext cx="1298448" cy="410566"/>
+            <a:ext cx="1245413" cy="410566"/>
           </a:xfrm>
           <a:prstGeom prst="rect">
             <a:avLst/>
@@ -1298,7 +1298,7 @@
             <a:avLst/>
           </a:prstGeom>
           <a:solidFill>
-            <a:srgbClr val="FFDD5F"/>
+            <a:srgbClr val="FFDE59"/>
           </a:solidFill>
           <a:ln/>
         </p:spPr>
@@ -1430,7 +1430,7 @@
         <p:spPr>
           <a:xfrm>
             <a:off x="10716768" y="6053328"/>
-            <a:ext cx="948233" cy="299923"/>
+            <a:ext cx="909828" cy="299923"/>
           </a:xfrm>
           <a:prstGeom prst="rect">
             <a:avLst/>
@@ -1564,7 +1564,7 @@
         <p:spPr>
           <a:xfrm>
             <a:off x="10716768" y="6053328"/>
-            <a:ext cx="948233" cy="299923"/>
+            <a:ext cx="909828" cy="299923"/>
           </a:xfrm>
           <a:prstGeom prst="rect">
             <a:avLst/>
@@ -1624,7 +1624,7 @@
     <p:bg>
       <p:bgPr>
         <a:solidFill>
-          <a:srgbClr val="3D3D3D"/>
+          <a:srgbClr val="3E3E3E"/>
         </a:solidFill>
       </p:bgPr>
     </p:bg>
@@ -1668,7 +1668,7 @@
               <a:buNone/>
               <a:defRPr lang="en-US" sz="6000" dirty="0">
                 <a:solidFill>
-                  <a:srgbClr val="FFDD5F"/>
+                  <a:srgbClr val="FFDE59"/>
                 </a:solidFill>
               </a:defRPr>
             </a:lvl1pPr>
@@ -1737,7 +1737,7 @@
         <p:spPr>
           <a:xfrm>
             <a:off x="10332720" y="5760720"/>
-            <a:ext cx="1298448" cy="410566"/>
+            <a:ext cx="1245413" cy="410566"/>
           </a:xfrm>
           <a:prstGeom prst="rect">
             <a:avLst/>
@@ -1759,7 +1759,7 @@
             <a:avLst/>
           </a:prstGeom>
           <a:solidFill>
-            <a:srgbClr val="FFDD5F"/>
+            <a:srgbClr val="FFDE59"/>
           </a:solidFill>
           <a:ln/>
         </p:spPr>
@@ -2239,7 +2239,7 @@
             <a:r>
               <a:rPr lang="en-US" sz="1300" b="1" spc="400" kern="0" dirty="0">
                 <a:solidFill>
-                  <a:srgbClr val="FFDD5F"/>
+                  <a:srgbClr val="FFDE59"/>
                 </a:solidFill>
               </a:rPr>
               <a:t>SECTION 01</a:t>
@@ -2428,7 +2428,7 @@
             <a:avLst/>
           </a:prstGeom>
           <a:solidFill>
-            <a:srgbClr val="FFDD5F"/>
+            <a:srgbClr val="FFDE59"/>
           </a:solidFill>
           <a:ln/>
         </p:spPr>
@@ -2596,7 +2596,7 @@
             <a:avLst/>
           </a:prstGeom>
           <a:solidFill>
-            <a:srgbClr val="FFDD5F"/>
+            <a:srgbClr val="FFDE59"/>
           </a:solidFill>
           <a:ln/>
         </p:spPr>
@@ -2764,7 +2764,7 @@
             <a:avLst/>
           </a:prstGeom>
           <a:solidFill>
-            <a:srgbClr val="FFDD5F"/>
+            <a:srgbClr val="FFDE59"/>
           </a:solidFill>
           <a:ln/>
         </p:spPr>
@@ -3039,7 +3039,7 @@
             <a:r>
               <a:rPr lang="en-US" sz="7600" dirty="0">
                 <a:solidFill>
-                  <a:srgbClr val="FFDD5F"/>
+                  <a:srgbClr val="FFDE59"/>
                 </a:solidFill>
                 <a:latin typeface="Bebas Neue" pitchFamily="34" charset="0"/>
                 <a:ea typeface="Bebas Neue" pitchFamily="34" charset="-122"/>
@@ -3114,7 +3114,7 @@
             <a:r>
               <a:rPr lang="en-US" sz="7600" dirty="0">
                 <a:solidFill>
-                  <a:srgbClr val="FFDD5F"/>
+                  <a:srgbClr val="FFDE59"/>
                 </a:solidFill>
                 <a:latin typeface="Bebas Neue" pitchFamily="34" charset="0"/>
                 <a:ea typeface="Bebas Neue" pitchFamily="34" charset="-122"/>
@@ -3189,7 +3189,7 @@
             <a:r>
               <a:rPr lang="en-US" sz="7600" dirty="0">
                 <a:solidFill>
-                  <a:srgbClr val="FFDD5F"/>
+                  <a:srgbClr val="FFDE59"/>
                 </a:solidFill>
                 <a:latin typeface="Bebas Neue" pitchFamily="34" charset="0"/>
                 <a:ea typeface="Bebas Neue" pitchFamily="34" charset="-122"/>
@@ -3264,7 +3264,7 @@
             <a:r>
               <a:rPr lang="en-US" sz="7600" dirty="0">
                 <a:solidFill>
-                  <a:srgbClr val="FFDD5F"/>
+                  <a:srgbClr val="FFDE59"/>
                 </a:solidFill>
                 <a:latin typeface="Bebas Neue" pitchFamily="34" charset="0"/>
                 <a:ea typeface="Bebas Neue" pitchFamily="34" charset="-122"/>
@@ -3459,7 +3459,7 @@
             <a:r>
               <a:rPr lang="en-US" sz="6000" dirty="0">
                 <a:solidFill>
-                  <a:srgbClr val="FFDD5F"/>
+                  <a:srgbClr val="FFDE59"/>
                 </a:solidFill>
               </a:rPr>
               <a:t>JUST WATCH US</a:t>
@@ -3519,7 +3519,7 @@
   <a:themeElements>
     <a:clrScheme name="Spark Packaging">
       <a:dk1>
-        <a:srgbClr val="3D3D3D"/>
+        <a:srgbClr val="3E3E3E"/>
       </a:dk1>
       <a:lt1>
         <a:srgbClr val="FFFFFF"/>
@@ -3531,7 +3531,7 @@
         <a:srgbClr val="FAF9F6"/>
       </a:lt2>
       <a:accent1>
-        <a:srgbClr val="FFDD5F"/>
+        <a:srgbClr val="FFDE59"/>
       </a:accent1>
       <a:accent2>
         <a:srgbClr val="FFE98F"/>
